--- a/artifacts/semantic_revision_20261022/pptx/Figure04_Semantic.pptx
+++ b/artifacts/semantic_revision_20261022/pptx/Figure04_Semantic.pptx
@@ -3712,6 +3712,10 @@
                   <a:round/>
                 </a:ln>
               </p:spPr>
+              <p:txBody xmlns:a="http://schemas.openxmlformats.org/drawingml/2006/main">
+                <a:bodyPr/>
+                <a:p/>
+              </p:txBody>
             </p:sp>
             <p:sp>
               <p:nvSpPr>
@@ -3765,6 +3769,10 @@
                   <a:round/>
                 </a:ln>
               </p:spPr>
+              <p:txBody xmlns:a="http://schemas.openxmlformats.org/drawingml/2006/main">
+                <a:bodyPr/>
+                <a:p/>
+              </p:txBody>
             </p:sp>
           </p:grpSp>
           <p:sp>
@@ -3999,6 +4007,10 @@
                   <a:round/>
                 </a:ln>
               </p:spPr>
+              <p:txBody xmlns:a="http://schemas.openxmlformats.org/drawingml/2006/main">
+                <a:bodyPr/>
+                <a:p/>
+              </p:txBody>
             </p:sp>
             <p:sp>
               <p:nvSpPr>
@@ -4060,6 +4072,10 @@
                   <a:round/>
                 </a:ln>
               </p:spPr>
+              <p:txBody xmlns:a="http://schemas.openxmlformats.org/drawingml/2006/main">
+                <a:bodyPr/>
+                <a:p/>
+              </p:txBody>
             </p:sp>
             <p:sp>
               <p:nvSpPr>
@@ -4101,6 +4117,10 @@
                   <a:round/>
                 </a:ln>
               </p:spPr>
+              <p:txBody xmlns:a="http://schemas.openxmlformats.org/drawingml/2006/main">
+                <a:bodyPr/>
+                <a:p/>
+              </p:txBody>
             </p:sp>
             <p:sp>
               <p:nvSpPr>
@@ -4158,6 +4178,10 @@
                   <a:round/>
                 </a:ln>
               </p:spPr>
+              <p:txBody xmlns:a="http://schemas.openxmlformats.org/drawingml/2006/main">
+                <a:bodyPr/>
+                <a:p/>
+              </p:txBody>
             </p:sp>
             <p:sp>
               <p:nvSpPr>
@@ -4224,6 +4248,10 @@
                   <a:round/>
                 </a:ln>
               </p:spPr>
+              <p:txBody xmlns:a="http://schemas.openxmlformats.org/drawingml/2006/main">
+                <a:bodyPr/>
+                <a:p/>
+              </p:txBody>
             </p:sp>
             <p:sp>
               <p:nvSpPr>
@@ -4290,6 +4318,10 @@
                   <a:round/>
                 </a:ln>
               </p:spPr>
+              <p:txBody xmlns:a="http://schemas.openxmlformats.org/drawingml/2006/main">
+                <a:bodyPr/>
+                <a:p/>
+              </p:txBody>
             </p:sp>
           </p:grpSp>
           <p:sp>
@@ -4517,6 +4549,10 @@
                   <a:round/>
                 </a:ln>
               </p:spPr>
+              <p:txBody xmlns:a="http://schemas.openxmlformats.org/drawingml/2006/main">
+                <a:bodyPr/>
+                <a:p/>
+              </p:txBody>
             </p:sp>
             <p:sp>
               <p:nvSpPr>
@@ -4571,6 +4607,10 @@
                   <a:round/>
                 </a:ln>
               </p:spPr>
+              <p:txBody xmlns:a="http://schemas.openxmlformats.org/drawingml/2006/main">
+                <a:bodyPr/>
+                <a:p/>
+              </p:txBody>
             </p:sp>
             <p:sp>
               <p:nvSpPr>
@@ -4625,6 +4665,10 @@
                   <a:round/>
                 </a:ln>
               </p:spPr>
+              <p:txBody xmlns:a="http://schemas.openxmlformats.org/drawingml/2006/main">
+                <a:bodyPr/>
+                <a:p/>
+              </p:txBody>
             </p:sp>
             <p:sp>
               <p:nvSpPr>
@@ -4679,6 +4723,10 @@
                   <a:round/>
                 </a:ln>
               </p:spPr>
+              <p:txBody xmlns:a="http://schemas.openxmlformats.org/drawingml/2006/main">
+                <a:bodyPr/>
+                <a:p/>
+              </p:txBody>
             </p:sp>
             <p:sp>
               <p:nvSpPr>
@@ -4747,6 +4795,10 @@
                   <a:round/>
                 </a:ln>
               </p:spPr>
+              <p:txBody xmlns:a="http://schemas.openxmlformats.org/drawingml/2006/main">
+                <a:bodyPr/>
+                <a:p/>
+              </p:txBody>
             </p:sp>
             <p:sp>
               <p:nvSpPr>
@@ -4825,6 +4877,10 @@
                   <a:round/>
                 </a:ln>
               </p:spPr>
+              <p:txBody xmlns:a="http://schemas.openxmlformats.org/drawingml/2006/main">
+                <a:bodyPr/>
+                <a:p/>
+              </p:txBody>
             </p:sp>
           </p:grpSp>
           <p:sp>
@@ -5066,6 +5122,10 @@
                   <a:round/>
                 </a:ln>
               </p:spPr>
+              <p:txBody xmlns:a="http://schemas.openxmlformats.org/drawingml/2006/main">
+                <a:bodyPr/>
+                <a:p/>
+              </p:txBody>
             </p:sp>
             <p:sp>
               <p:nvSpPr>
@@ -5143,6 +5203,10 @@
                   <a:round/>
                 </a:ln>
               </p:spPr>
+              <p:txBody xmlns:a="http://schemas.openxmlformats.org/drawingml/2006/main">
+                <a:bodyPr/>
+                <a:p/>
+              </p:txBody>
             </p:sp>
             <p:sp>
               <p:nvSpPr>
@@ -5211,6 +5275,10 @@
                   <a:round/>
                 </a:ln>
               </p:spPr>
+              <p:txBody xmlns:a="http://schemas.openxmlformats.org/drawingml/2006/main">
+                <a:bodyPr/>
+                <a:p/>
+              </p:txBody>
             </p:sp>
           </p:grpSp>
           <p:sp>
@@ -5562,6 +5630,10 @@
                 <a:round/>
               </a:ln>
             </p:spPr>
+            <p:txBody xmlns:a="http://schemas.openxmlformats.org/drawingml/2006/main">
+              <a:bodyPr/>
+              <a:p/>
+            </p:txBody>
           </p:sp>
           <p:sp>
             <p:nvSpPr>
@@ -5754,6 +5826,10 @@
                 <a:round/>
               </a:ln>
             </p:spPr>
+            <p:txBody xmlns:a="http://schemas.openxmlformats.org/drawingml/2006/main">
+              <a:bodyPr/>
+              <a:p/>
+            </p:txBody>
           </p:sp>
           <p:sp>
             <p:nvSpPr>
@@ -5946,6 +6022,10 @@
                 <a:round/>
               </a:ln>
             </p:spPr>
+            <p:txBody xmlns:a="http://schemas.openxmlformats.org/drawingml/2006/main">
+              <a:bodyPr/>
+              <a:p/>
+            </p:txBody>
           </p:sp>
           <p:sp>
             <p:nvSpPr>
@@ -6138,6 +6218,10 @@
                 <a:round/>
               </a:ln>
             </p:spPr>
+            <p:txBody xmlns:a="http://schemas.openxmlformats.org/drawingml/2006/main">
+              <a:bodyPr/>
+              <a:p/>
+            </p:txBody>
           </p:sp>
           <p:sp>
             <p:nvSpPr>
@@ -6179,6 +6263,10 @@
                 <a:round/>
               </a:ln>
             </p:spPr>
+            <p:txBody xmlns:a="http://schemas.openxmlformats.org/drawingml/2006/main">
+              <a:bodyPr/>
+              <a:p/>
+            </p:txBody>
           </p:sp>
           <p:sp>
             <p:nvSpPr>
@@ -6220,6 +6308,10 @@
                 <a:round/>
               </a:ln>
             </p:spPr>
+            <p:txBody xmlns:a="http://schemas.openxmlformats.org/drawingml/2006/main">
+              <a:bodyPr/>
+              <a:p/>
+            </p:txBody>
           </p:sp>
           <p:sp>
             <p:nvSpPr>
@@ -6261,6 +6353,10 @@
                 <a:round/>
               </a:ln>
             </p:spPr>
+            <p:txBody xmlns:a="http://schemas.openxmlformats.org/drawingml/2006/main">
+              <a:bodyPr/>
+              <a:p/>
+            </p:txBody>
           </p:sp>
           <p:sp>
             <p:nvSpPr>
@@ -6302,6 +6398,10 @@
                 <a:round/>
               </a:ln>
             </p:spPr>
+            <p:txBody xmlns:a="http://schemas.openxmlformats.org/drawingml/2006/main">
+              <a:bodyPr/>
+              <a:p/>
+            </p:txBody>
           </p:sp>
           <p:grpSp>
             <p:nvGrpSpPr>
@@ -6387,6 +6487,10 @@
                   <a:round/>
                 </a:ln>
               </p:spPr>
+              <p:txBody xmlns:a="http://schemas.openxmlformats.org/drawingml/2006/main">
+                <a:bodyPr/>
+                <a:p/>
+              </p:txBody>
             </p:sp>
             <p:sp>
               <p:nvSpPr>
@@ -6615,6 +6719,10 @@
                     <a:round/>
                   </a:ln>
                 </p:spPr>
+                <p:txBody xmlns:a="http://schemas.openxmlformats.org/drawingml/2006/main">
+                  <a:bodyPr/>
+                  <a:p/>
+                </p:txBody>
               </p:sp>
               <p:sp>
                 <p:nvSpPr>
@@ -6681,6 +6789,10 @@
                     <a:round/>
                   </a:ln>
                 </p:spPr>
+                <p:txBody xmlns:a="http://schemas.openxmlformats.org/drawingml/2006/main">
+                  <a:bodyPr/>
+                  <a:p/>
+                </p:txBody>
               </p:sp>
               <p:sp>
                 <p:nvSpPr>
@@ -6722,6 +6834,10 @@
                     <a:round/>
                   </a:ln>
                 </p:spPr>
+                <p:txBody xmlns:a="http://schemas.openxmlformats.org/drawingml/2006/main">
+                  <a:bodyPr/>
+                  <a:p/>
+                </p:txBody>
               </p:sp>
               <p:sp>
                 <p:nvSpPr>
@@ -6763,6 +6879,10 @@
                     <a:round/>
                   </a:ln>
                 </p:spPr>
+                <p:txBody xmlns:a="http://schemas.openxmlformats.org/drawingml/2006/main">
+                  <a:bodyPr/>
+                  <a:p/>
+                </p:txBody>
               </p:sp>
             </p:grpSp>
             <p:sp>
@@ -7150,6 +7270,10 @@
                     <a:round/>
                   </a:ln>
                 </p:spPr>
+                <p:txBody xmlns:a="http://schemas.openxmlformats.org/drawingml/2006/main">
+                  <a:bodyPr/>
+                  <a:p/>
+                </p:txBody>
               </p:sp>
               <p:sp>
                 <p:nvSpPr>
@@ -7191,6 +7315,10 @@
                     <a:round/>
                   </a:ln>
                 </p:spPr>
+                <p:txBody xmlns:a="http://schemas.openxmlformats.org/drawingml/2006/main">
+                  <a:bodyPr/>
+                  <a:p/>
+                </p:txBody>
               </p:sp>
               <p:sp>
                 <p:nvSpPr>
@@ -7232,6 +7360,10 @@
                     <a:round/>
                   </a:ln>
                 </p:spPr>
+                <p:txBody xmlns:a="http://schemas.openxmlformats.org/drawingml/2006/main">
+                  <a:bodyPr/>
+                  <a:p/>
+                </p:txBody>
               </p:sp>
               <p:sp>
                 <p:nvSpPr>
@@ -7273,6 +7405,10 @@
                     <a:round/>
                   </a:ln>
                 </p:spPr>
+                <p:txBody xmlns:a="http://schemas.openxmlformats.org/drawingml/2006/main">
+                  <a:bodyPr/>
+                  <a:p/>
+                </p:txBody>
               </p:sp>
               <p:sp>
                 <p:nvSpPr>
@@ -7314,6 +7450,10 @@
                     <a:round/>
                   </a:ln>
                 </p:spPr>
+                <p:txBody xmlns:a="http://schemas.openxmlformats.org/drawingml/2006/main">
+                  <a:bodyPr/>
+                  <a:p/>
+                </p:txBody>
               </p:sp>
               <p:sp>
                 <p:nvSpPr>
@@ -7355,6 +7495,10 @@
                     <a:round/>
                   </a:ln>
                 </p:spPr>
+                <p:txBody xmlns:a="http://schemas.openxmlformats.org/drawingml/2006/main">
+                  <a:bodyPr/>
+                  <a:p/>
+                </p:txBody>
               </p:sp>
             </p:grpSp>
             <p:sp>
@@ -7768,6 +7912,10 @@
                     <a:round/>
                   </a:ln>
                 </p:spPr>
+                <p:txBody xmlns:a="http://schemas.openxmlformats.org/drawingml/2006/main">
+                  <a:bodyPr/>
+                  <a:p/>
+                </p:txBody>
               </p:sp>
               <p:sp>
                 <p:nvSpPr>
@@ -7866,6 +8014,10 @@
                     <a:round/>
                   </a:ln>
                 </p:spPr>
+                <p:txBody xmlns:a="http://schemas.openxmlformats.org/drawingml/2006/main">
+                  <a:bodyPr/>
+                  <a:p/>
+                </p:txBody>
               </p:sp>
               <p:sp>
                 <p:nvSpPr>
@@ -7907,6 +8059,10 @@
                     <a:round/>
                   </a:ln>
                 </p:spPr>
+                <p:txBody xmlns:a="http://schemas.openxmlformats.org/drawingml/2006/main">
+                  <a:bodyPr/>
+                  <a:p/>
+                </p:txBody>
               </p:sp>
               <p:sp>
                 <p:nvSpPr>
@@ -7948,6 +8104,10 @@
                     <a:round/>
                   </a:ln>
                 </p:spPr>
+                <p:txBody xmlns:a="http://schemas.openxmlformats.org/drawingml/2006/main">
+                  <a:bodyPr/>
+                  <a:p/>
+                </p:txBody>
               </p:sp>
             </p:grpSp>
             <p:sp>
@@ -8312,6 +8472,10 @@
                   <a:round/>
                 </a:ln>
               </p:spPr>
+              <p:txBody xmlns:a="http://schemas.openxmlformats.org/drawingml/2006/main">
+                <a:bodyPr/>
+                <a:p/>
+              </p:txBody>
             </p:sp>
             <p:sp>
               <p:nvSpPr>
@@ -8371,6 +8535,10 @@
                   <a:round/>
                 </a:ln>
               </p:spPr>
+              <p:txBody xmlns:a="http://schemas.openxmlformats.org/drawingml/2006/main">
+                <a:bodyPr/>
+                <a:p/>
+              </p:txBody>
             </p:sp>
             <p:sp>
               <p:nvSpPr>
@@ -8421,6 +8589,10 @@
                   <a:round/>
                 </a:ln>
               </p:spPr>
+              <p:txBody xmlns:a="http://schemas.openxmlformats.org/drawingml/2006/main">
+                <a:bodyPr/>
+                <a:p/>
+              </p:txBody>
             </p:sp>
             <p:sp>
               <p:nvSpPr>
@@ -8468,6 +8640,10 @@
                   <a:round/>
                 </a:ln>
               </p:spPr>
+              <p:txBody xmlns:a="http://schemas.openxmlformats.org/drawingml/2006/main">
+                <a:bodyPr/>
+                <a:p/>
+              </p:txBody>
             </p:sp>
             <p:sp>
               <p:nvSpPr>
@@ -8699,6 +8875,10 @@
                     <a:round/>
                   </a:ln>
                 </p:spPr>
+                <p:txBody xmlns:a="http://schemas.openxmlformats.org/drawingml/2006/main">
+                  <a:bodyPr/>
+                  <a:p/>
+                </p:txBody>
               </p:sp>
               <p:sp>
                 <p:nvSpPr>
@@ -8743,6 +8923,10 @@
                     <a:round/>
                   </a:ln>
                 </p:spPr>
+                <p:txBody xmlns:a="http://schemas.openxmlformats.org/drawingml/2006/main">
+                  <a:bodyPr/>
+                  <a:p/>
+                </p:txBody>
               </p:sp>
               <p:sp>
                 <p:nvSpPr>
@@ -8800,6 +8984,10 @@
                     <a:round/>
                   </a:ln>
                 </p:spPr>
+                <p:txBody xmlns:a="http://schemas.openxmlformats.org/drawingml/2006/main">
+                  <a:bodyPr/>
+                  <a:p/>
+                </p:txBody>
               </p:sp>
               <p:sp>
                 <p:nvSpPr>
@@ -8851,6 +9039,10 @@
                     <a:round/>
                   </a:ln>
                 </p:spPr>
+                <p:txBody xmlns:a="http://schemas.openxmlformats.org/drawingml/2006/main">
+                  <a:bodyPr/>
+                  <a:p/>
+                </p:txBody>
               </p:sp>
               <p:sp>
                 <p:nvSpPr>
@@ -8900,6 +9092,10 @@
                     <a:round/>
                   </a:ln>
                 </p:spPr>
+                <p:txBody xmlns:a="http://schemas.openxmlformats.org/drawingml/2006/main">
+                  <a:bodyPr/>
+                  <a:p/>
+                </p:txBody>
               </p:sp>
             </p:grpSp>
             <p:sp>
@@ -8948,6 +9144,10 @@
                 <a:effectRef xmlns:a="http://schemas.openxmlformats.org/drawingml/2006/main" idx="10"/>
                 <a:fontRef xmlns:a="http://schemas.openxmlformats.org/drawingml/2006/main" idx="major"/>
               </p:style>
+              <p:txBody xmlns:a="http://schemas.openxmlformats.org/drawingml/2006/main">
+                <a:bodyPr/>
+                <a:p/>
+              </p:txBody>
             </p:sp>
             <p:sp>
               <p:nvSpPr>
@@ -8995,6 +9195,10 @@
                   <a:round/>
                 </a:ln>
               </p:spPr>
+              <p:txBody xmlns:a="http://schemas.openxmlformats.org/drawingml/2006/main">
+                <a:bodyPr/>
+                <a:p/>
+              </p:txBody>
             </p:sp>
             <p:grpSp>
               <p:nvGrpSpPr>
@@ -9063,6 +9267,10 @@
                     <a:round/>
                   </a:ln>
                 </p:spPr>
+                <p:txBody xmlns:a="http://schemas.openxmlformats.org/drawingml/2006/main">
+                  <a:bodyPr/>
+                  <a:p/>
+                </p:txBody>
               </p:sp>
               <p:sp>
                 <p:nvSpPr>
@@ -9117,6 +9325,10 @@
                     <a:round/>
                   </a:ln>
                 </p:spPr>
+                <p:txBody xmlns:a="http://schemas.openxmlformats.org/drawingml/2006/main">
+                  <a:bodyPr/>
+                  <a:p/>
+                </p:txBody>
               </p:sp>
             </p:grpSp>
             <p:sp>
@@ -9323,6 +9535,10 @@
                   <a:round/>
                 </a:ln>
               </p:spPr>
+              <p:txBody xmlns:a="http://schemas.openxmlformats.org/drawingml/2006/main">
+                <a:bodyPr/>
+                <a:p/>
+              </p:txBody>
             </p:sp>
             <p:sp>
               <p:nvSpPr>
@@ -9391,6 +9607,10 @@
                   <a:round/>
                 </a:ln>
               </p:spPr>
+              <p:txBody xmlns:a="http://schemas.openxmlformats.org/drawingml/2006/main">
+                <a:bodyPr/>
+                <a:p/>
+              </p:txBody>
             </p:sp>
             <p:sp>
               <p:nvSpPr>
@@ -9438,6 +9658,10 @@
                   <a:round/>
                 </a:ln>
               </p:spPr>
+              <p:txBody xmlns:a="http://schemas.openxmlformats.org/drawingml/2006/main">
+                <a:bodyPr/>
+                <a:p/>
+              </p:txBody>
             </p:sp>
             <p:sp>
               <p:nvSpPr>
@@ -9693,6 +9917,10 @@
                     <a:round/>
                   </a:ln>
                 </p:spPr>
+                <p:txBody xmlns:a="http://schemas.openxmlformats.org/drawingml/2006/main">
+                  <a:bodyPr/>
+                  <a:p/>
+                </p:txBody>
               </p:sp>
               <p:sp>
                 <p:nvSpPr>
@@ -9770,6 +9998,10 @@
                     <a:round/>
                   </a:ln>
                 </p:spPr>
+                <p:txBody xmlns:a="http://schemas.openxmlformats.org/drawingml/2006/main">
+                  <a:bodyPr/>
+                  <a:p/>
+                </p:txBody>
               </p:sp>
               <p:sp>
                 <p:nvSpPr>
@@ -9838,6 +10070,10 @@
                     <a:round/>
                   </a:ln>
                 </p:spPr>
+                <p:txBody xmlns:a="http://schemas.openxmlformats.org/drawingml/2006/main">
+                  <a:bodyPr/>
+                  <a:p/>
+                </p:txBody>
               </p:sp>
             </p:grpSp>
             <p:grpSp>
@@ -9894,6 +10130,10 @@
                     <a:round/>
                   </a:ln>
                 </p:spPr>
+                <p:txBody xmlns:a="http://schemas.openxmlformats.org/drawingml/2006/main">
+                  <a:bodyPr/>
+                  <a:p/>
+                </p:txBody>
               </p:sp>
               <p:sp>
                 <p:nvSpPr>
@@ -9938,6 +10178,10 @@
                     <a:round/>
                   </a:ln>
                 </p:spPr>
+                <p:txBody xmlns:a="http://schemas.openxmlformats.org/drawingml/2006/main">
+                  <a:bodyPr/>
+                  <a:p/>
+                </p:txBody>
               </p:sp>
               <p:sp>
                 <p:nvSpPr>
@@ -10029,6 +10273,10 @@
                     <a:round/>
                   </a:ln>
                 </p:spPr>
+                <p:txBody xmlns:a="http://schemas.openxmlformats.org/drawingml/2006/main">
+                  <a:bodyPr/>
+                  <a:p/>
+                </p:txBody>
               </p:sp>
               <p:sp>
                 <p:nvSpPr>
@@ -10073,6 +10321,10 @@
                     <a:round/>
                   </a:ln>
                 </p:spPr>
+                <p:txBody xmlns:a="http://schemas.openxmlformats.org/drawingml/2006/main">
+                  <a:bodyPr/>
+                  <a:p/>
+                </p:txBody>
               </p:sp>
               <p:sp>
                 <p:nvSpPr>
@@ -10114,6 +10366,10 @@
                     <a:round/>
                   </a:ln>
                 </p:spPr>
+                <p:txBody xmlns:a="http://schemas.openxmlformats.org/drawingml/2006/main">
+                  <a:bodyPr/>
+                  <a:p/>
+                </p:txBody>
               </p:sp>
             </p:grpSp>
             <p:sp>
@@ -10162,6 +10418,10 @@
                 <a:effectRef xmlns:a="http://schemas.openxmlformats.org/drawingml/2006/main" idx="10"/>
                 <a:fontRef xmlns:a="http://schemas.openxmlformats.org/drawingml/2006/main" idx="major"/>
               </p:style>
+              <p:txBody xmlns:a="http://schemas.openxmlformats.org/drawingml/2006/main">
+                <a:bodyPr/>
+                <a:p/>
+              </p:txBody>
             </p:sp>
             <p:sp>
               <p:nvSpPr>
@@ -10209,6 +10469,10 @@
                   <a:round/>
                 </a:ln>
               </p:spPr>
+              <p:txBody xmlns:a="http://schemas.openxmlformats.org/drawingml/2006/main">
+                <a:bodyPr/>
+                <a:p/>
+              </p:txBody>
             </p:sp>
             <p:sp>
               <p:nvSpPr>
@@ -10440,6 +10704,10 @@
                     <a:round/>
                   </a:ln>
                 </p:spPr>
+                <p:txBody xmlns:a="http://schemas.openxmlformats.org/drawingml/2006/main">
+                  <a:bodyPr/>
+                  <a:p/>
+                </p:txBody>
               </p:sp>
               <p:sp>
                 <p:nvSpPr>
@@ -10481,6 +10749,10 @@
                     <a:round/>
                   </a:ln>
                 </p:spPr>
+                <p:txBody xmlns:a="http://schemas.openxmlformats.org/drawingml/2006/main">
+                  <a:bodyPr/>
+                  <a:p/>
+                </p:txBody>
               </p:sp>
               <p:sp>
                 <p:nvSpPr>
@@ -10561,6 +10833,10 @@
                     <a:round/>
                   </a:ln>
                 </p:spPr>
+                <p:txBody xmlns:a="http://schemas.openxmlformats.org/drawingml/2006/main">
+                  <a:bodyPr/>
+                  <a:p/>
+                </p:txBody>
               </p:sp>
               <p:sp>
                 <p:nvSpPr>
@@ -10602,6 +10878,10 @@
                     <a:round/>
                   </a:ln>
                 </p:spPr>
+                <p:txBody xmlns:a="http://schemas.openxmlformats.org/drawingml/2006/main">
+                  <a:bodyPr/>
+                  <a:p/>
+                </p:txBody>
               </p:sp>
               <p:sp>
                 <p:nvSpPr>
@@ -10643,6 +10923,10 @@
                     <a:round/>
                   </a:ln>
                 </p:spPr>
+                <p:txBody xmlns:a="http://schemas.openxmlformats.org/drawingml/2006/main">
+                  <a:bodyPr/>
+                  <a:p/>
+                </p:txBody>
               </p:sp>
               <p:sp>
                 <p:nvSpPr>
@@ -10711,6 +10995,10 @@
                     <a:round/>
                   </a:ln>
                 </p:spPr>
+                <p:txBody xmlns:a="http://schemas.openxmlformats.org/drawingml/2006/main">
+                  <a:bodyPr/>
+                  <a:p/>
+                </p:txBody>
               </p:sp>
             </p:grpSp>
             <p:grpSp>
@@ -10767,6 +11055,10 @@
                     <a:round/>
                   </a:ln>
                 </p:spPr>
+                <p:txBody xmlns:a="http://schemas.openxmlformats.org/drawingml/2006/main">
+                  <a:bodyPr/>
+                  <a:p/>
+                </p:txBody>
               </p:sp>
               <p:sp>
                 <p:nvSpPr>
@@ -10808,6 +11100,10 @@
                     <a:round/>
                   </a:ln>
                 </p:spPr>
+                <p:txBody xmlns:a="http://schemas.openxmlformats.org/drawingml/2006/main">
+                  <a:bodyPr/>
+                  <a:p/>
+                </p:txBody>
               </p:sp>
               <p:sp>
                 <p:nvSpPr>
@@ -10901,6 +11197,10 @@
                     <a:round/>
                   </a:ln>
                 </p:spPr>
+                <p:txBody xmlns:a="http://schemas.openxmlformats.org/drawingml/2006/main">
+                  <a:bodyPr/>
+                  <a:p/>
+                </p:txBody>
               </p:sp>
             </p:grpSp>
             <p:sp>
@@ -11142,6 +11442,10 @@
                     <a:round/>
                   </a:ln>
                 </p:spPr>
+                <p:txBody xmlns:a="http://schemas.openxmlformats.org/drawingml/2006/main">
+                  <a:bodyPr/>
+                  <a:p/>
+                </p:txBody>
               </p:sp>
               <p:sp>
                 <p:nvSpPr>
@@ -11185,6 +11489,10 @@
                     <a:round/>
                   </a:ln>
                 </p:spPr>
+                <p:txBody xmlns:a="http://schemas.openxmlformats.org/drawingml/2006/main">
+                  <a:bodyPr/>
+                  <a:p/>
+                </p:txBody>
               </p:sp>
               <p:sp>
                 <p:nvSpPr>
@@ -11228,6 +11536,10 @@
                     <a:round/>
                   </a:ln>
                 </p:spPr>
+                <p:txBody xmlns:a="http://schemas.openxmlformats.org/drawingml/2006/main">
+                  <a:bodyPr/>
+                  <a:p/>
+                </p:txBody>
               </p:sp>
               <p:sp>
                 <p:nvSpPr>
@@ -11281,6 +11593,10 @@
                     <a:round/>
                   </a:ln>
                 </p:spPr>
+                <p:txBody xmlns:a="http://schemas.openxmlformats.org/drawingml/2006/main">
+                  <a:bodyPr/>
+                  <a:p/>
+                </p:txBody>
               </p:sp>
               <p:sp>
                 <p:nvSpPr>
@@ -11322,6 +11638,10 @@
                     <a:round/>
                   </a:ln>
                 </p:spPr>
+                <p:txBody xmlns:a="http://schemas.openxmlformats.org/drawingml/2006/main">
+                  <a:bodyPr/>
+                  <a:p/>
+                </p:txBody>
               </p:sp>
               <p:sp>
                 <p:nvSpPr>
@@ -11365,6 +11685,10 @@
                     <a:round/>
                   </a:ln>
                 </p:spPr>
+                <p:txBody xmlns:a="http://schemas.openxmlformats.org/drawingml/2006/main">
+                  <a:bodyPr/>
+                  <a:p/>
+                </p:txBody>
               </p:sp>
               <p:sp>
                 <p:nvSpPr>
@@ -11413,6 +11737,10 @@
                     <a:round/>
                   </a:ln>
                 </p:spPr>
+                <p:txBody xmlns:a="http://schemas.openxmlformats.org/drawingml/2006/main">
+                  <a:bodyPr/>
+                  <a:p/>
+                </p:txBody>
               </p:sp>
               <p:sp>
                 <p:nvSpPr>
@@ -11456,6 +11784,10 @@
                     <a:round/>
                   </a:ln>
                 </p:spPr>
+                <p:txBody xmlns:a="http://schemas.openxmlformats.org/drawingml/2006/main">
+                  <a:bodyPr/>
+                  <a:p/>
+                </p:txBody>
               </p:sp>
               <p:sp>
                 <p:nvSpPr>
@@ -11512,6 +11844,10 @@
                     <a:round/>
                   </a:ln>
                 </p:spPr>
+                <p:txBody xmlns:a="http://schemas.openxmlformats.org/drawingml/2006/main">
+                  <a:bodyPr/>
+                  <a:p/>
+                </p:txBody>
               </p:sp>
             </p:grpSp>
             <p:sp>
@@ -11560,6 +11896,10 @@
                 <a:effectRef xmlns:a="http://schemas.openxmlformats.org/drawingml/2006/main" idx="10"/>
                 <a:fontRef xmlns:a="http://schemas.openxmlformats.org/drawingml/2006/main" idx="major"/>
               </p:style>
+              <p:txBody xmlns:a="http://schemas.openxmlformats.org/drawingml/2006/main">
+                <a:bodyPr/>
+                <a:p/>
+              </p:txBody>
             </p:sp>
             <p:sp>
               <p:nvSpPr>
@@ -11607,6 +11947,10 @@
                   <a:round/>
                 </a:ln>
               </p:spPr>
+              <p:txBody xmlns:a="http://schemas.openxmlformats.org/drawingml/2006/main">
+                <a:bodyPr/>
+                <a:p/>
+              </p:txBody>
             </p:sp>
             <p:grpSp>
               <p:nvGrpSpPr>
@@ -11662,6 +12006,10 @@
                     <a:round/>
                   </a:ln>
                 </p:spPr>
+                <p:txBody xmlns:a="http://schemas.openxmlformats.org/drawingml/2006/main">
+                  <a:bodyPr/>
+                  <a:p/>
+                </p:txBody>
               </p:sp>
               <p:sp>
                 <p:nvSpPr>
@@ -11703,6 +12051,10 @@
                     <a:round/>
                   </a:ln>
                 </p:spPr>
+                <p:txBody xmlns:a="http://schemas.openxmlformats.org/drawingml/2006/main">
+                  <a:bodyPr/>
+                  <a:p/>
+                </p:txBody>
               </p:sp>
               <p:sp>
                 <p:nvSpPr>
@@ -11744,6 +12096,10 @@
                     <a:round/>
                   </a:ln>
                 </p:spPr>
+                <p:txBody xmlns:a="http://schemas.openxmlformats.org/drawingml/2006/main">
+                  <a:bodyPr/>
+                  <a:p/>
+                </p:txBody>
               </p:sp>
               <p:sp>
                 <p:nvSpPr>
@@ -11812,6 +12168,10 @@
                     <a:round/>
                   </a:ln>
                 </p:spPr>
+                <p:txBody xmlns:a="http://schemas.openxmlformats.org/drawingml/2006/main">
+                  <a:bodyPr/>
+                  <a:p/>
+                </p:txBody>
               </p:sp>
               <p:sp>
                 <p:nvSpPr>
@@ -11853,6 +12213,10 @@
                     <a:round/>
                   </a:ln>
                 </p:spPr>
+                <p:txBody xmlns:a="http://schemas.openxmlformats.org/drawingml/2006/main">
+                  <a:bodyPr/>
+                  <a:p/>
+                </p:txBody>
               </p:sp>
             </p:grpSp>
             <p:sp>
@@ -12107,6 +12471,10 @@
                     <a:round/>
                   </a:ln>
                 </p:spPr>
+                <p:txBody xmlns:a="http://schemas.openxmlformats.org/drawingml/2006/main">
+                  <a:bodyPr/>
+                  <a:p/>
+                </p:txBody>
               </p:sp>
               <p:sp>
                 <p:nvSpPr>
@@ -12200,6 +12568,10 @@
                     <a:round/>
                   </a:ln>
                 </p:spPr>
+                <p:txBody xmlns:a="http://schemas.openxmlformats.org/drawingml/2006/main">
+                  <a:bodyPr/>
+                  <a:p/>
+                </p:txBody>
               </p:sp>
               <p:sp>
                 <p:nvSpPr>
@@ -12241,6 +12613,10 @@
                     <a:round/>
                   </a:ln>
                 </p:spPr>
+                <p:txBody xmlns:a="http://schemas.openxmlformats.org/drawingml/2006/main">
+                  <a:bodyPr/>
+                  <a:p/>
+                </p:txBody>
               </p:sp>
               <p:sp>
                 <p:nvSpPr>
@@ -12282,6 +12658,10 @@
                     <a:round/>
                   </a:ln>
                 </p:spPr>
+                <p:txBody xmlns:a="http://schemas.openxmlformats.org/drawingml/2006/main">
+                  <a:bodyPr/>
+                  <a:p/>
+                </p:txBody>
               </p:sp>
               <p:sp>
                 <p:nvSpPr>
@@ -12323,6 +12703,10 @@
                     <a:round/>
                   </a:ln>
                 </p:spPr>
+                <p:txBody xmlns:a="http://schemas.openxmlformats.org/drawingml/2006/main">
+                  <a:bodyPr/>
+                  <a:p/>
+                </p:txBody>
               </p:sp>
               <p:sp>
                 <p:nvSpPr>
@@ -12364,6 +12748,10 @@
                     <a:round/>
                   </a:ln>
                 </p:spPr>
+                <p:txBody xmlns:a="http://schemas.openxmlformats.org/drawingml/2006/main">
+                  <a:bodyPr/>
+                  <a:p/>
+                </p:txBody>
               </p:sp>
             </p:grpSp>
             <p:grpSp>
@@ -12420,6 +12808,10 @@
                     <a:round/>
                   </a:ln>
                 </p:spPr>
+                <p:txBody xmlns:a="http://schemas.openxmlformats.org/drawingml/2006/main">
+                  <a:bodyPr/>
+                  <a:p/>
+                </p:txBody>
               </p:sp>
               <p:sp>
                 <p:nvSpPr>
@@ -12461,6 +12853,10 @@
                     <a:round/>
                   </a:ln>
                 </p:spPr>
+                <p:txBody xmlns:a="http://schemas.openxmlformats.org/drawingml/2006/main">
+                  <a:bodyPr/>
+                  <a:p/>
+                </p:txBody>
               </p:sp>
               <p:sp>
                 <p:nvSpPr>
@@ -12554,6 +12950,10 @@
                     <a:round/>
                   </a:ln>
                 </p:spPr>
+                <p:txBody xmlns:a="http://schemas.openxmlformats.org/drawingml/2006/main">
+                  <a:bodyPr/>
+                  <a:p/>
+                </p:txBody>
               </p:sp>
             </p:grpSp>
             <p:sp>
@@ -12810,6 +13210,10 @@
                     <a:round/>
                   </a:ln>
                 </p:spPr>
+                <p:txBody xmlns:a="http://schemas.openxmlformats.org/drawingml/2006/main">
+                  <a:bodyPr/>
+                  <a:p/>
+                </p:txBody>
               </p:sp>
               <p:sp>
                 <p:nvSpPr>
@@ -12887,6 +13291,10 @@
                     <a:round/>
                   </a:ln>
                 </p:spPr>
+                <p:txBody xmlns:a="http://schemas.openxmlformats.org/drawingml/2006/main">
+                  <a:bodyPr/>
+                  <a:p/>
+                </p:txBody>
               </p:sp>
               <p:sp>
                 <p:nvSpPr>
@@ -12955,6 +13363,10 @@
                     <a:round/>
                   </a:ln>
                 </p:spPr>
+                <p:txBody xmlns:a="http://schemas.openxmlformats.org/drawingml/2006/main">
+                  <a:bodyPr/>
+                  <a:p/>
+                </p:txBody>
               </p:sp>
             </p:grpSp>
             <p:grpSp>
@@ -13011,6 +13423,10 @@
                     <a:round/>
                   </a:ln>
                 </p:spPr>
+                <p:txBody xmlns:a="http://schemas.openxmlformats.org/drawingml/2006/main">
+                  <a:bodyPr/>
+                  <a:p/>
+                </p:txBody>
               </p:sp>
               <p:sp>
                 <p:nvSpPr>
@@ -13052,6 +13468,10 @@
                     <a:round/>
                   </a:ln>
                 </p:spPr>
+                <p:txBody xmlns:a="http://schemas.openxmlformats.org/drawingml/2006/main">
+                  <a:bodyPr/>
+                  <a:p/>
+                </p:txBody>
               </p:sp>
               <p:sp>
                 <p:nvSpPr>
@@ -13093,6 +13513,10 @@
                     <a:round/>
                   </a:ln>
                 </p:spPr>
+                <p:txBody xmlns:a="http://schemas.openxmlformats.org/drawingml/2006/main">
+                  <a:bodyPr/>
+                  <a:p/>
+                </p:txBody>
               </p:sp>
               <p:sp>
                 <p:nvSpPr>
@@ -13161,6 +13585,10 @@
                     <a:round/>
                   </a:ln>
                 </p:spPr>
+                <p:txBody xmlns:a="http://schemas.openxmlformats.org/drawingml/2006/main">
+                  <a:bodyPr/>
+                  <a:p/>
+                </p:txBody>
               </p:sp>
               <p:sp>
                 <p:nvSpPr>
@@ -13202,6 +13630,10 @@
                     <a:round/>
                   </a:ln>
                 </p:spPr>
+                <p:txBody xmlns:a="http://schemas.openxmlformats.org/drawingml/2006/main">
+                  <a:bodyPr/>
+                  <a:p/>
+                </p:txBody>
               </p:sp>
             </p:grpSp>
             <p:sp>
@@ -13408,6 +13840,10 @@
                   <a:round/>
                 </a:ln>
               </p:spPr>
+              <p:txBody xmlns:a="http://schemas.openxmlformats.org/drawingml/2006/main">
+                <a:bodyPr/>
+                <a:p/>
+              </p:txBody>
             </p:sp>
             <p:sp>
               <p:nvSpPr>
@@ -13455,6 +13891,10 @@
                 <a:effectRef xmlns:a="http://schemas.openxmlformats.org/drawingml/2006/main" idx="10"/>
                 <a:fontRef xmlns:a="http://schemas.openxmlformats.org/drawingml/2006/main" idx="major"/>
               </p:style>
+              <p:txBody xmlns:a="http://schemas.openxmlformats.org/drawingml/2006/main">
+                <a:bodyPr/>
+                <a:p/>
+              </p:txBody>
             </p:sp>
             <p:sp>
               <p:nvSpPr>
@@ -13502,6 +13942,10 @@
                   <a:round/>
                 </a:ln>
               </p:spPr>
+              <p:txBody xmlns:a="http://schemas.openxmlformats.org/drawingml/2006/main">
+                <a:bodyPr/>
+                <a:p/>
+              </p:txBody>
             </p:sp>
             <p:sp>
               <p:nvSpPr>
@@ -13543,6 +13987,10 @@
                   <a:round/>
                 </a:ln>
               </p:spPr>
+              <p:txBody xmlns:a="http://schemas.openxmlformats.org/drawingml/2006/main">
+                <a:bodyPr/>
+                <a:p/>
+              </p:txBody>
             </p:sp>
             <p:sp>
               <p:nvSpPr>
@@ -13942,6 +14390,10 @@
                     <a:round/>
                   </a:ln>
                 </p:spPr>
+                <p:txBody xmlns:a="http://schemas.openxmlformats.org/drawingml/2006/main">
+                  <a:bodyPr/>
+                  <a:p/>
+                </p:txBody>
               </p:sp>
               <p:sp>
                 <p:nvSpPr>
@@ -13996,6 +14448,10 @@
                     <a:round/>
                   </a:ln>
                 </p:spPr>
+                <p:txBody xmlns:a="http://schemas.openxmlformats.org/drawingml/2006/main">
+                  <a:bodyPr/>
+                  <a:p/>
+                </p:txBody>
               </p:sp>
               <p:sp>
                 <p:nvSpPr>
@@ -14050,6 +14506,10 @@
                     <a:round/>
                   </a:ln>
                 </p:spPr>
+                <p:txBody xmlns:a="http://schemas.openxmlformats.org/drawingml/2006/main">
+                  <a:bodyPr/>
+                  <a:p/>
+                </p:txBody>
               </p:sp>
               <p:sp>
                 <p:nvSpPr>
@@ -14104,6 +14564,10 @@
                     <a:round/>
                   </a:ln>
                 </p:spPr>
+                <p:txBody xmlns:a="http://schemas.openxmlformats.org/drawingml/2006/main">
+                  <a:bodyPr/>
+                  <a:p/>
+                </p:txBody>
               </p:sp>
               <p:sp>
                 <p:nvSpPr>
@@ -14172,6 +14636,10 @@
                     <a:round/>
                   </a:ln>
                 </p:spPr>
+                <p:txBody xmlns:a="http://schemas.openxmlformats.org/drawingml/2006/main">
+                  <a:bodyPr/>
+                  <a:p/>
+                </p:txBody>
               </p:sp>
               <p:sp>
                 <p:nvSpPr>
@@ -14250,6 +14718,10 @@
                     <a:round/>
                   </a:ln>
                 </p:spPr>
+                <p:txBody xmlns:a="http://schemas.openxmlformats.org/drawingml/2006/main">
+                  <a:bodyPr/>
+                  <a:p/>
+                </p:txBody>
               </p:sp>
             </p:grpSp>
             <p:sp>
@@ -14295,6 +14767,10 @@
                   <a:round/>
                 </a:ln>
               </p:spPr>
+              <p:txBody xmlns:a="http://schemas.openxmlformats.org/drawingml/2006/main">
+                <a:bodyPr/>
+                <a:p/>
+              </p:txBody>
             </p:sp>
             <p:sp>
               <p:nvSpPr>
@@ -14523,6 +14999,10 @@
                     <a:round/>
                   </a:ln>
                 </p:spPr>
+                <p:txBody xmlns:a="http://schemas.openxmlformats.org/drawingml/2006/main">
+                  <a:bodyPr/>
+                  <a:p/>
+                </p:txBody>
               </p:sp>
               <p:sp>
                 <p:nvSpPr>
@@ -14589,6 +15069,10 @@
                     <a:round/>
                   </a:ln>
                 </p:spPr>
+                <p:txBody xmlns:a="http://schemas.openxmlformats.org/drawingml/2006/main">
+                  <a:bodyPr/>
+                  <a:p/>
+                </p:txBody>
               </p:sp>
               <p:sp>
                 <p:nvSpPr>
@@ -14630,6 +15114,10 @@
                     <a:round/>
                   </a:ln>
                 </p:spPr>
+                <p:txBody xmlns:a="http://schemas.openxmlformats.org/drawingml/2006/main">
+                  <a:bodyPr/>
+                  <a:p/>
+                </p:txBody>
               </p:sp>
               <p:sp>
                 <p:nvSpPr>
@@ -14671,6 +15159,10 @@
                     <a:round/>
                   </a:ln>
                 </p:spPr>
+                <p:txBody xmlns:a="http://schemas.openxmlformats.org/drawingml/2006/main">
+                  <a:bodyPr/>
+                  <a:p/>
+                </p:txBody>
               </p:sp>
             </p:grpSp>
             <p:sp>
@@ -14719,6 +15211,10 @@
                 <a:effectRef xmlns:a="http://schemas.openxmlformats.org/drawingml/2006/main" idx="10"/>
                 <a:fontRef xmlns:a="http://schemas.openxmlformats.org/drawingml/2006/main" idx="major"/>
               </p:style>
+              <p:txBody xmlns:a="http://schemas.openxmlformats.org/drawingml/2006/main">
+                <a:bodyPr/>
+                <a:p/>
+              </p:txBody>
             </p:sp>
             <p:sp>
               <p:nvSpPr>
@@ -14766,6 +15262,10 @@
                   <a:round/>
                 </a:ln>
               </p:spPr>
+              <p:txBody xmlns:a="http://schemas.openxmlformats.org/drawingml/2006/main">
+                <a:bodyPr/>
+                <a:p/>
+              </p:txBody>
             </p:sp>
             <p:grpSp>
               <p:nvGrpSpPr>
@@ -14863,6 +15363,10 @@
                     <a:round/>
                   </a:ln>
                 </p:spPr>
+                <p:txBody xmlns:a="http://schemas.openxmlformats.org/drawingml/2006/main">
+                  <a:bodyPr/>
+                  <a:p/>
+                </p:txBody>
               </p:sp>
               <p:sp>
                 <p:nvSpPr>
@@ -14917,6 +15421,10 @@
                     <a:round/>
                   </a:ln>
                 </p:spPr>
+                <p:txBody xmlns:a="http://schemas.openxmlformats.org/drawingml/2006/main">
+                  <a:bodyPr/>
+                  <a:p/>
+                </p:txBody>
               </p:sp>
               <p:sp>
                 <p:nvSpPr>
@@ -14961,6 +15469,10 @@
                     <a:round/>
                   </a:ln>
                 </p:spPr>
+                <p:txBody xmlns:a="http://schemas.openxmlformats.org/drawingml/2006/main">
+                  <a:bodyPr/>
+                  <a:p/>
+                </p:txBody>
               </p:sp>
             </p:grpSp>
             <p:sp>
@@ -15167,6 +15679,10 @@
                   <a:round/>
                 </a:ln>
               </p:spPr>
+              <p:txBody xmlns:a="http://schemas.openxmlformats.org/drawingml/2006/main">
+                <a:bodyPr/>
+                <a:p/>
+              </p:txBody>
             </p:sp>
             <p:sp>
               <p:nvSpPr>
@@ -15208,6 +15724,10 @@
                   <a:round/>
                 </a:ln>
               </p:spPr>
+              <p:txBody xmlns:a="http://schemas.openxmlformats.org/drawingml/2006/main">
+                <a:bodyPr/>
+                <a:p/>
+              </p:txBody>
             </p:sp>
             <p:sp>
               <p:nvSpPr>
@@ -15249,6 +15769,10 @@
                   <a:round/>
                 </a:ln>
               </p:spPr>
+              <p:txBody xmlns:a="http://schemas.openxmlformats.org/drawingml/2006/main">
+                <a:bodyPr/>
+                <a:p/>
+              </p:txBody>
             </p:sp>
             <p:sp>
               <p:nvSpPr>
@@ -15281,6 +15805,10 @@
                   <a:round/>
                 </a:ln>
               </p:spPr>
+              <p:txBody xmlns:a="http://schemas.openxmlformats.org/drawingml/2006/main">
+                <a:bodyPr/>
+                <a:p/>
+              </p:txBody>
             </p:sp>
             <p:sp>
               <p:nvSpPr>
@@ -16303,6 +16831,10 @@
                   <a:round/>
                 </a:ln>
               </p:spPr>
+              <p:txBody xmlns:a="http://schemas.openxmlformats.org/drawingml/2006/main">
+                <a:bodyPr/>
+                <a:p/>
+              </p:txBody>
             </p:sp>
             <p:sp>
               <p:nvSpPr>
@@ -16347,6 +16879,10 @@
                   <a:round/>
                 </a:ln>
               </p:spPr>
+              <p:txBody xmlns:a="http://schemas.openxmlformats.org/drawingml/2006/main">
+                <a:bodyPr/>
+                <a:p/>
+              </p:txBody>
             </p:sp>
             <p:sp>
               <p:nvSpPr>
@@ -16388,6 +16924,10 @@
                   <a:round/>
                 </a:ln>
               </p:spPr>
+              <p:txBody xmlns:a="http://schemas.openxmlformats.org/drawingml/2006/main">
+                <a:bodyPr/>
+                <a:p/>
+              </p:txBody>
             </p:sp>
           </p:grpSp>
           <p:sp>
@@ -16436,6 +16976,10 @@
               <a:effectRef xmlns:a="http://schemas.openxmlformats.org/drawingml/2006/main" idx="10"/>
               <a:fontRef xmlns:a="http://schemas.openxmlformats.org/drawingml/2006/main" idx="major"/>
             </p:style>
+            <p:txBody xmlns:a="http://schemas.openxmlformats.org/drawingml/2006/main">
+              <a:bodyPr/>
+              <a:p/>
+            </p:txBody>
           </p:sp>
           <p:sp>
             <p:nvSpPr>
@@ -16483,6 +17027,10 @@
                 <a:round/>
               </a:ln>
             </p:spPr>
+            <p:txBody xmlns:a="http://schemas.openxmlformats.org/drawingml/2006/main">
+              <a:bodyPr/>
+              <a:p/>
+            </p:txBody>
           </p:sp>
           <p:grpSp>
             <p:nvGrpSpPr>
@@ -16563,6 +17111,10 @@
                   <a:round/>
                 </a:ln>
               </p:spPr>
+              <p:txBody xmlns:a="http://schemas.openxmlformats.org/drawingml/2006/main">
+                <a:bodyPr/>
+                <a:p/>
+              </p:txBody>
             </p:sp>
             <p:sp>
               <p:nvSpPr>
@@ -16614,6 +17166,10 @@
                   <a:round/>
                 </a:ln>
               </p:spPr>
+              <p:txBody xmlns:a="http://schemas.openxmlformats.org/drawingml/2006/main">
+                <a:bodyPr/>
+                <a:p/>
+              </p:txBody>
             </p:sp>
             <p:sp>
               <p:nvSpPr>
@@ -16655,6 +17211,10 @@
                   <a:round/>
                 </a:ln>
               </p:spPr>
+              <p:txBody xmlns:a="http://schemas.openxmlformats.org/drawingml/2006/main">
+                <a:bodyPr/>
+                <a:p/>
+              </p:txBody>
             </p:sp>
           </p:grpSp>
           <p:grpSp>
@@ -16714,6 +17274,10 @@
                   <a:round/>
                 </a:ln>
               </p:spPr>
+              <p:txBody xmlns:a="http://schemas.openxmlformats.org/drawingml/2006/main">
+                <a:bodyPr/>
+                <a:p/>
+              </p:txBody>
             </p:sp>
             <p:sp>
               <p:nvSpPr>
@@ -16755,6 +17319,10 @@
                   <a:round/>
                 </a:ln>
               </p:spPr>
+              <p:txBody xmlns:a="http://schemas.openxmlformats.org/drawingml/2006/main">
+                <a:bodyPr/>
+                <a:p/>
+              </p:txBody>
             </p:sp>
             <p:sp>
               <p:nvSpPr>
@@ -16835,6 +17403,10 @@
                   <a:round/>
                 </a:ln>
               </p:spPr>
+              <p:txBody xmlns:a="http://schemas.openxmlformats.org/drawingml/2006/main">
+                <a:bodyPr/>
+                <a:p/>
+              </p:txBody>
             </p:sp>
             <p:sp>
               <p:nvSpPr>
@@ -16876,6 +17448,10 @@
                   <a:round/>
                 </a:ln>
               </p:spPr>
+              <p:txBody xmlns:a="http://schemas.openxmlformats.org/drawingml/2006/main">
+                <a:bodyPr/>
+                <a:p/>
+              </p:txBody>
             </p:sp>
             <p:sp>
               <p:nvSpPr>
@@ -16917,6 +17493,10 @@
                   <a:round/>
                 </a:ln>
               </p:spPr>
+              <p:txBody xmlns:a="http://schemas.openxmlformats.org/drawingml/2006/main">
+                <a:bodyPr/>
+                <a:p/>
+              </p:txBody>
             </p:sp>
             <p:sp>
               <p:nvSpPr>
@@ -16985,6 +17565,10 @@
                   <a:round/>
                 </a:ln>
               </p:spPr>
+              <p:txBody xmlns:a="http://schemas.openxmlformats.org/drawingml/2006/main">
+                <a:bodyPr/>
+                <a:p/>
+              </p:txBody>
             </p:sp>
           </p:grpSp>
           <p:sp>
@@ -17033,6 +17617,10 @@
               <a:effectRef xmlns:a="http://schemas.openxmlformats.org/drawingml/2006/main" idx="10"/>
               <a:fontRef xmlns:a="http://schemas.openxmlformats.org/drawingml/2006/main" idx="major"/>
             </p:style>
+            <p:txBody xmlns:a="http://schemas.openxmlformats.org/drawingml/2006/main">
+              <a:bodyPr/>
+              <a:p/>
+            </p:txBody>
           </p:sp>
           <p:sp>
             <p:nvSpPr>
@@ -17080,6 +17668,10 @@
                 <a:round/>
               </a:ln>
             </p:spPr>
+            <p:txBody xmlns:a="http://schemas.openxmlformats.org/drawingml/2006/main">
+              <a:bodyPr/>
+              <a:p/>
+            </p:txBody>
           </p:sp>
           <p:grpSp>
             <p:nvGrpSpPr>
@@ -17135,6 +17727,10 @@
                   <a:round/>
                 </a:ln>
               </p:spPr>
+              <p:txBody xmlns:a="http://schemas.openxmlformats.org/drawingml/2006/main">
+                <a:bodyPr/>
+                <a:p/>
+              </p:txBody>
             </p:sp>
             <p:sp>
               <p:nvSpPr>
@@ -17201,6 +17797,10 @@
                   <a:round/>
                 </a:ln>
               </p:spPr>
+              <p:txBody xmlns:a="http://schemas.openxmlformats.org/drawingml/2006/main">
+                <a:bodyPr/>
+                <a:p/>
+              </p:txBody>
             </p:sp>
             <p:sp>
               <p:nvSpPr>
@@ -17242,6 +17842,10 @@
                   <a:round/>
                 </a:ln>
               </p:spPr>
+              <p:txBody xmlns:a="http://schemas.openxmlformats.org/drawingml/2006/main">
+                <a:bodyPr/>
+                <a:p/>
+              </p:txBody>
             </p:sp>
             <p:sp>
               <p:nvSpPr>
@@ -17283,6 +17887,10 @@
                   <a:round/>
                 </a:ln>
               </p:spPr>
+              <p:txBody xmlns:a="http://schemas.openxmlformats.org/drawingml/2006/main">
+                <a:bodyPr/>
+                <a:p/>
+              </p:txBody>
             </p:sp>
           </p:grpSp>
           <p:sp>
@@ -17343,6 +17951,10 @@
                 <a:round/>
               </a:ln>
             </p:spPr>
+            <p:txBody xmlns:a="http://schemas.openxmlformats.org/drawingml/2006/main">
+              <a:bodyPr/>
+              <a:p/>
+            </p:txBody>
           </p:sp>
           <p:sp>
             <p:nvSpPr>
@@ -17375,6 +17987,10 @@
                 <a:round/>
               </a:ln>
             </p:spPr>
+            <p:txBody xmlns:a="http://schemas.openxmlformats.org/drawingml/2006/main">
+              <a:bodyPr/>
+              <a:p/>
+            </p:txBody>
           </p:sp>
           <p:sp>
             <p:nvSpPr>
@@ -17416,6 +18032,10 @@
                 <a:round/>
               </a:ln>
             </p:spPr>
+            <p:txBody xmlns:a="http://schemas.openxmlformats.org/drawingml/2006/main">
+              <a:bodyPr/>
+              <a:p/>
+            </p:txBody>
           </p:sp>
           <p:sp>
             <p:nvSpPr>
@@ -17473,6 +18093,10 @@
                 <a:round/>
               </a:ln>
             </p:spPr>
+            <p:txBody xmlns:a="http://schemas.openxmlformats.org/drawingml/2006/main">
+              <a:bodyPr/>
+              <a:p/>
+            </p:txBody>
           </p:sp>
           <p:sp>
             <p:nvSpPr>
@@ -17523,6 +18147,10 @@
                 <a:round/>
               </a:ln>
             </p:spPr>
+            <p:txBody xmlns:a="http://schemas.openxmlformats.org/drawingml/2006/main">
+              <a:bodyPr/>
+              <a:p/>
+            </p:txBody>
           </p:sp>
           <p:sp>
             <p:nvSpPr>
@@ -17920,6 +18548,10 @@
                   <a:round/>
                 </a:ln>
               </p:spPr>
+              <p:txBody xmlns:a="http://schemas.openxmlformats.org/drawingml/2006/main">
+                <a:bodyPr/>
+                <a:p/>
+              </p:txBody>
             </p:sp>
             <p:sp>
               <p:nvSpPr>
@@ -18018,6 +18650,10 @@
                   <a:round/>
                 </a:ln>
               </p:spPr>
+              <p:txBody xmlns:a="http://schemas.openxmlformats.org/drawingml/2006/main">
+                <a:bodyPr/>
+                <a:p/>
+              </p:txBody>
             </p:sp>
             <p:sp>
               <p:nvSpPr>
@@ -18059,6 +18695,10 @@
                   <a:round/>
                 </a:ln>
               </p:spPr>
+              <p:txBody xmlns:a="http://schemas.openxmlformats.org/drawingml/2006/main">
+                <a:bodyPr/>
+                <a:p/>
+              </p:txBody>
             </p:sp>
             <p:sp>
               <p:nvSpPr>
@@ -18100,6 +18740,10 @@
                   <a:round/>
                 </a:ln>
               </p:spPr>
+              <p:txBody xmlns:a="http://schemas.openxmlformats.org/drawingml/2006/main">
+                <a:bodyPr/>
+                <a:p/>
+              </p:txBody>
             </p:sp>
           </p:grpSp>
           <p:sp>
@@ -18148,6 +18792,10 @@
               <a:effectRef xmlns:a="http://schemas.openxmlformats.org/drawingml/2006/main" idx="10"/>
               <a:fontRef xmlns:a="http://schemas.openxmlformats.org/drawingml/2006/main" idx="major"/>
             </p:style>
+            <p:txBody xmlns:a="http://schemas.openxmlformats.org/drawingml/2006/main">
+              <a:bodyPr/>
+              <a:p/>
+            </p:txBody>
           </p:sp>
           <p:sp>
             <p:nvSpPr>
@@ -18195,6 +18843,10 @@
                 <a:round/>
               </a:ln>
             </p:spPr>
+            <p:txBody xmlns:a="http://schemas.openxmlformats.org/drawingml/2006/main">
+              <a:bodyPr/>
+              <a:p/>
+            </p:txBody>
           </p:sp>
           <p:grpSp>
             <p:nvGrpSpPr>
@@ -18250,6 +18902,10 @@
                   <a:round/>
                 </a:ln>
               </p:spPr>
+              <p:txBody xmlns:a="http://schemas.openxmlformats.org/drawingml/2006/main">
+                <a:bodyPr/>
+                <a:p/>
+              </p:txBody>
             </p:sp>
             <p:sp>
               <p:nvSpPr>
@@ -18294,6 +18950,10 @@
                   <a:round/>
                 </a:ln>
               </p:spPr>
+              <p:txBody xmlns:a="http://schemas.openxmlformats.org/drawingml/2006/main">
+                <a:bodyPr/>
+                <a:p/>
+              </p:txBody>
             </p:sp>
             <p:sp>
               <p:nvSpPr>
@@ -18385,6 +19045,10 @@
                   <a:round/>
                 </a:ln>
               </p:spPr>
+              <p:txBody xmlns:a="http://schemas.openxmlformats.org/drawingml/2006/main">
+                <a:bodyPr/>
+                <a:p/>
+              </p:txBody>
             </p:sp>
             <p:sp>
               <p:nvSpPr>
@@ -18429,6 +19093,10 @@
                   <a:round/>
                 </a:ln>
               </p:spPr>
+              <p:txBody xmlns:a="http://schemas.openxmlformats.org/drawingml/2006/main">
+                <a:bodyPr/>
+                <a:p/>
+              </p:txBody>
             </p:sp>
             <p:sp>
               <p:nvSpPr>
@@ -18470,6 +19138,10 @@
                   <a:round/>
                 </a:ln>
               </p:spPr>
+              <p:txBody xmlns:a="http://schemas.openxmlformats.org/drawingml/2006/main">
+                <a:bodyPr/>
+                <a:p/>
+              </p:txBody>
             </p:sp>
           </p:grpSp>
           <p:sp>
@@ -18783,7 +19455,7 @@
                     <a:ea typeface="Arial"/>
                     <a:cs typeface="Arial"/>
                   </a:rPr>
-                  <a:t>General Time-Series Harness</a:t>
+                  <a:t>General Time Series Harness</a:t>
                 </a:r>
               </a:p>
             </p:txBody>
@@ -19150,6 +19822,10 @@
               <a:effectRef xmlns:a="http://schemas.openxmlformats.org/drawingml/2006/main" idx="10"/>
               <a:fontRef xmlns:a="http://schemas.openxmlformats.org/drawingml/2006/main" idx="major"/>
             </p:style>
+            <p:txBody xmlns:a="http://schemas.openxmlformats.org/drawingml/2006/main">
+              <a:bodyPr/>
+              <a:p/>
+            </p:txBody>
           </p:sp>
           <p:sp>
             <p:nvSpPr>
@@ -19197,6 +19873,10 @@
                 <a:round/>
               </a:ln>
             </p:spPr>
+            <p:txBody xmlns:a="http://schemas.openxmlformats.org/drawingml/2006/main">
+              <a:bodyPr/>
+              <a:p/>
+            </p:txBody>
           </p:sp>
           <p:sp>
             <p:nvSpPr>
@@ -19244,6 +19924,10 @@
               <a:effectRef xmlns:a="http://schemas.openxmlformats.org/drawingml/2006/main" idx="10"/>
               <a:fontRef xmlns:a="http://schemas.openxmlformats.org/drawingml/2006/main" idx="major"/>
             </p:style>
+            <p:txBody xmlns:a="http://schemas.openxmlformats.org/drawingml/2006/main">
+              <a:bodyPr/>
+              <a:p/>
+            </p:txBody>
           </p:sp>
           <p:sp>
             <p:nvSpPr>
@@ -19291,6 +19975,10 @@
                 <a:round/>
               </a:ln>
             </p:spPr>
+            <p:txBody xmlns:a="http://schemas.openxmlformats.org/drawingml/2006/main">
+              <a:bodyPr/>
+              <a:p/>
+            </p:txBody>
           </p:sp>
           <p:sp>
             <p:nvSpPr>
@@ -19338,6 +20026,10 @@
               <a:effectRef xmlns:a="http://schemas.openxmlformats.org/drawingml/2006/main" idx="10"/>
               <a:fontRef xmlns:a="http://schemas.openxmlformats.org/drawingml/2006/main" idx="major"/>
             </p:style>
+            <p:txBody xmlns:a="http://schemas.openxmlformats.org/drawingml/2006/main">
+              <a:bodyPr/>
+              <a:p/>
+            </p:txBody>
           </p:sp>
           <p:sp>
             <p:nvSpPr>
@@ -19385,6 +20077,10 @@
                 <a:round/>
               </a:ln>
             </p:spPr>
+            <p:txBody xmlns:a="http://schemas.openxmlformats.org/drawingml/2006/main">
+              <a:bodyPr/>
+              <a:p/>
+            </p:txBody>
           </p:sp>
         </p:grpSp>
       </p:grpSp>

--- a/artifacts/semantic_revision_20261022/pptx/Figure04_Semantic.pptx
+++ b/artifacts/semantic_revision_20261022/pptx/Figure04_Semantic.pptx
@@ -3636,7 +3636,7 @@
                     <a:solidFill>
                       <a:srgbClr val="24272A"/>
                     </a:solidFill>
-                    <a:latin typeface="Comic Sans MS"/>
+                    <a:latin typeface="Times New Roman"/>
                     <a:ea typeface="Comic Sans MS"/>
                     <a:cs typeface="Comic Sans MS"/>
                   </a:rPr>
@@ -3924,7 +3924,7 @@
                     <a:solidFill>
                       <a:srgbClr val="24272A"/>
                     </a:solidFill>
-                    <a:latin typeface="Comic Sans MS"/>
+                    <a:latin typeface="Times New Roman"/>
                     <a:ea typeface="Comic Sans MS"/>
                     <a:cs typeface="Comic Sans MS"/>
                   </a:rPr>
@@ -4473,7 +4473,7 @@
                     <a:solidFill>
                       <a:srgbClr val="24272A"/>
                     </a:solidFill>
-                    <a:latin typeface="Comic Sans MS"/>
+                    <a:latin typeface="Times New Roman"/>
                     <a:ea typeface="Comic Sans MS"/>
                     <a:cs typeface="Comic Sans MS"/>
                   </a:rPr>
@@ -5032,7 +5032,7 @@
                     <a:solidFill>
                       <a:srgbClr val="24272A"/>
                     </a:solidFill>
-                    <a:latin typeface="Comic Sans MS"/>
+                    <a:latin typeface="Times New Roman"/>
                     <a:ea typeface="Comic Sans MS"/>
                     <a:cs typeface="Comic Sans MS"/>
                   </a:rPr>
@@ -5430,7 +5430,7 @@
                     <a:solidFill>
                       <a:srgbClr val="24272A"/>
                     </a:solidFill>
-                    <a:latin typeface="Comic Sans MS"/>
+                    <a:latin typeface="Times New Roman"/>
                     <a:ea typeface="Comic Sans MS"/>
                     <a:cs typeface="Comic Sans MS"/>
                   </a:rPr>
@@ -5588,7 +5588,7 @@
                     <a:solidFill>
                       <a:srgbClr val="24272A"/>
                     </a:solidFill>
-                    <a:latin typeface="Arial"/>
+                    <a:latin typeface="Times New Roman"/>
                     <a:ea typeface="Arial"/>
                     <a:cs typeface="Arial"/>
                   </a:rPr>
@@ -5784,7 +5784,7 @@
                     <a:solidFill>
                       <a:srgbClr val="24272A"/>
                     </a:solidFill>
-                    <a:latin typeface="Arial"/>
+                    <a:latin typeface="Times New Roman"/>
                     <a:ea typeface="Arial"/>
                     <a:cs typeface="Arial"/>
                   </a:rPr>
@@ -5980,7 +5980,7 @@
                     <a:solidFill>
                       <a:srgbClr val="24272A"/>
                     </a:solidFill>
-                    <a:latin typeface="Arial"/>
+                    <a:latin typeface="Times New Roman"/>
                     <a:ea typeface="Arial"/>
                     <a:cs typeface="Arial"/>
                   </a:rPr>
@@ -6176,7 +6176,7 @@
                     <a:solidFill>
                       <a:srgbClr val="24272A"/>
                     </a:solidFill>
-                    <a:latin typeface="Arial"/>
+                    <a:latin typeface="Times New Roman"/>
                     <a:ea typeface="Arial"/>
                     <a:cs typeface="Arial"/>
                   </a:rPr>
@@ -6641,7 +6641,7 @@
                       <a:solidFill>
                         <a:srgbClr val="24272A"/>
                       </a:solidFill>
-                      <a:latin typeface="Arial"/>
+                      <a:latin typeface="Times New Roman"/>
                       <a:ea typeface="Arial"/>
                       <a:cs typeface="Arial"/>
                     </a:rPr>
@@ -7034,7 +7034,7 @@
                       <a:solidFill>
                         <a:srgbClr val="24272A"/>
                       </a:solidFill>
-                      <a:latin typeface="Arial"/>
+                      <a:latin typeface="Times New Roman"/>
                       <a:ea typeface="Arial"/>
                       <a:cs typeface="Arial"/>
                     </a:rPr>
@@ -7192,7 +7192,7 @@
                       <a:solidFill>
                         <a:srgbClr val="626A6F"/>
                       </a:solidFill>
-                      <a:latin typeface="Arial"/>
+                      <a:latin typeface="Times New Roman"/>
                       <a:ea typeface="Arial"/>
                       <a:cs typeface="Arial"/>
                     </a:rPr>
@@ -7650,7 +7650,7 @@
                       <a:solidFill>
                         <a:srgbClr val="24272A"/>
                       </a:solidFill>
-                      <a:latin typeface="Arial"/>
+                      <a:latin typeface="Times New Roman"/>
                       <a:ea typeface="Arial"/>
                       <a:cs typeface="Arial"/>
                     </a:rPr>
@@ -7808,7 +7808,7 @@
                       <a:solidFill>
                         <a:srgbClr val="626A6F"/>
                       </a:solidFill>
-                      <a:latin typeface="Arial"/>
+                      <a:latin typeface="Times New Roman"/>
                       <a:ea typeface="Arial"/>
                       <a:cs typeface="Arial"/>
                     </a:rPr>
@@ -8259,7 +8259,7 @@
                       <a:solidFill>
                         <a:srgbClr val="24272A"/>
                       </a:solidFill>
-                      <a:latin typeface="Arial"/>
+                      <a:latin typeface="Times New Roman"/>
                       <a:ea typeface="Arial"/>
                       <a:cs typeface="Arial"/>
                     </a:rPr>
@@ -8417,7 +8417,7 @@
                       <a:solidFill>
                         <a:srgbClr val="626A6F"/>
                       </a:solidFill>
-                      <a:latin typeface="Arial"/>
+                      <a:latin typeface="Times New Roman"/>
                       <a:ea typeface="Arial"/>
                       <a:cs typeface="Arial"/>
                     </a:rPr>
@@ -8794,7 +8794,7 @@
                       <a:solidFill>
                         <a:srgbClr val="24272A"/>
                       </a:solidFill>
-                      <a:latin typeface="Arial"/>
+                      <a:latin typeface="Times New Roman"/>
                       <a:ea typeface="Arial"/>
                       <a:cs typeface="Arial"/>
                     </a:rPr>
@@ -9480,7 +9480,7 @@
                       <a:solidFill>
                         <a:srgbClr val="24272A"/>
                       </a:solidFill>
-                      <a:latin typeface="Arial"/>
+                      <a:latin typeface="Times New Roman"/>
                       <a:ea typeface="Arial"/>
                       <a:cs typeface="Arial"/>
                     </a:rPr>
@@ -9812,7 +9812,7 @@
                       <a:solidFill>
                         <a:srgbClr val="24272A"/>
                       </a:solidFill>
-                      <a:latin typeface="Arial"/>
+                      <a:latin typeface="Times New Roman"/>
                       <a:ea typeface="Arial"/>
                       <a:cs typeface="Arial"/>
                     </a:rPr>
@@ -10623,7 +10623,7 @@
                       <a:solidFill>
                         <a:srgbClr val="24272A"/>
                       </a:solidFill>
-                      <a:latin typeface="Arial"/>
+                      <a:latin typeface="Times New Roman"/>
                       <a:ea typeface="Arial"/>
                       <a:cs typeface="Arial"/>
                     </a:rPr>
@@ -11352,7 +11352,7 @@
                       <a:solidFill>
                         <a:srgbClr val="24272A"/>
                       </a:solidFill>
-                      <a:latin typeface="Arial"/>
+                      <a:latin typeface="Times New Roman"/>
                       <a:ea typeface="Arial"/>
                       <a:cs typeface="Arial"/>
                     </a:rPr>
@@ -12368,7 +12368,7 @@
                       <a:solidFill>
                         <a:srgbClr val="24272A"/>
                       </a:solidFill>
-                      <a:latin typeface="Arial"/>
+                      <a:latin typeface="Times New Roman"/>
                       <a:ea typeface="Arial"/>
                       <a:cs typeface="Arial"/>
                     </a:rPr>
@@ -13105,7 +13105,7 @@
                       <a:solidFill>
                         <a:srgbClr val="24272A"/>
                       </a:solidFill>
-                      <a:latin typeface="Arial"/>
+                      <a:latin typeface="Times New Roman"/>
                       <a:ea typeface="Arial"/>
                       <a:cs typeface="Arial"/>
                     </a:rPr>
@@ -13785,7 +13785,7 @@
                       <a:solidFill>
                         <a:srgbClr val="24272A"/>
                       </a:solidFill>
-                      <a:latin typeface="Arial"/>
+                      <a:latin typeface="Times New Roman"/>
                       <a:ea typeface="Arial"/>
                       <a:cs typeface="Arial"/>
                     </a:rPr>
@@ -14141,7 +14141,7 @@
                       <a:solidFill>
                         <a:srgbClr val="24272A"/>
                       </a:solidFill>
-                      <a:latin typeface="Arial"/>
+                      <a:latin typeface="Times New Roman"/>
                       <a:ea typeface="Arial"/>
                       <a:cs typeface="Arial"/>
                     </a:rPr>
@@ -14299,7 +14299,7 @@
                       <a:solidFill>
                         <a:srgbClr val="24272A"/>
                       </a:solidFill>
-                      <a:latin typeface="Arial"/>
+                      <a:latin typeface="Times New Roman"/>
                       <a:ea typeface="Arial"/>
                       <a:cs typeface="Arial"/>
                     </a:rPr>
@@ -14921,7 +14921,7 @@
                       <a:solidFill>
                         <a:srgbClr val="24272A"/>
                       </a:solidFill>
-                      <a:latin typeface="Arial"/>
+                      <a:latin typeface="Times New Roman"/>
                       <a:ea typeface="Arial"/>
                       <a:cs typeface="Arial"/>
                     </a:rPr>
@@ -15624,7 +15624,7 @@
                       <a:solidFill>
                         <a:srgbClr val="24272A"/>
                       </a:solidFill>
-                      <a:latin typeface="Arial"/>
+                      <a:latin typeface="Times New Roman"/>
                       <a:ea typeface="Arial"/>
                       <a:cs typeface="Arial"/>
                     </a:rPr>
@@ -15959,7 +15959,7 @@
                       <a:solidFill>
                         <a:srgbClr val="24272A"/>
                       </a:solidFill>
-                      <a:latin typeface="Arial"/>
+                      <a:latin typeface="Times New Roman"/>
                       <a:ea typeface="Arial"/>
                       <a:cs typeface="Arial"/>
                     </a:rPr>
@@ -16133,7 +16133,7 @@
                     <a:solidFill>
                       <a:srgbClr val="24272A"/>
                     </a:solidFill>
-                    <a:latin typeface="Comic Sans MS"/>
+                    <a:latin typeface="Times New Roman"/>
                     <a:ea typeface="Comic Sans MS"/>
                     <a:cs typeface="Comic Sans MS"/>
                   </a:rPr>
@@ -16291,7 +16291,7 @@
                     <a:solidFill>
                       <a:srgbClr val="24272A"/>
                     </a:solidFill>
-                    <a:latin typeface="Comic Sans MS"/>
+                    <a:latin typeface="Times New Roman"/>
                     <a:ea typeface="Comic Sans MS"/>
                     <a:cs typeface="Comic Sans MS"/>
                   </a:rPr>
@@ -16449,7 +16449,7 @@
                     <a:solidFill>
                       <a:srgbClr val="24272A"/>
                     </a:solidFill>
-                    <a:latin typeface="Comic Sans MS"/>
+                    <a:latin typeface="Times New Roman"/>
                     <a:ea typeface="Comic Sans MS"/>
                     <a:cs typeface="Comic Sans MS"/>
                   </a:rPr>
@@ -16607,7 +16607,7 @@
                     <a:solidFill>
                       <a:srgbClr val="24272A"/>
                     </a:solidFill>
-                    <a:latin typeface="Comic Sans MS"/>
+                    <a:latin typeface="Times New Roman"/>
                     <a:ea typeface="Comic Sans MS"/>
                     <a:cs typeface="Comic Sans MS"/>
                   </a:rPr>
@@ -16765,7 +16765,7 @@
                     <a:solidFill>
                       <a:srgbClr val="24272A"/>
                     </a:solidFill>
-                    <a:latin typeface="Comic Sans MS"/>
+                    <a:latin typeface="Times New Roman"/>
                     <a:ea typeface="Comic Sans MS"/>
                     <a:cs typeface="Comic Sans MS"/>
                   </a:rPr>
@@ -18301,7 +18301,7 @@
                     <a:solidFill>
                       <a:srgbClr val="626A6F"/>
                     </a:solidFill>
-                    <a:latin typeface="Arial"/>
+                    <a:latin typeface="Times New Roman"/>
                     <a:ea typeface="Arial"/>
                     <a:cs typeface="Arial"/>
                   </a:rPr>
@@ -18459,7 +18459,7 @@
                     <a:solidFill>
                       <a:srgbClr val="626A6F"/>
                     </a:solidFill>
-                    <a:latin typeface="Arial"/>
+                    <a:latin typeface="Times New Roman"/>
                     <a:ea typeface="Arial"/>
                     <a:cs typeface="Arial"/>
                   </a:rPr>
@@ -19293,7 +19293,7 @@
                     <a:solidFill>
                       <a:srgbClr val="626A6F"/>
                     </a:solidFill>
-                    <a:latin typeface="Arial"/>
+                    <a:latin typeface="Times New Roman"/>
                     <a:ea typeface="Arial"/>
                     <a:cs typeface="Arial"/>
                   </a:rPr>
@@ -19451,7 +19451,7 @@
                     <a:solidFill>
                       <a:srgbClr val="626A6F"/>
                     </a:solidFill>
-                    <a:latin typeface="Arial"/>
+                    <a:latin typeface="Times New Roman"/>
                     <a:ea typeface="Arial"/>
                     <a:cs typeface="Arial"/>
                   </a:rPr>
@@ -19609,7 +19609,7 @@
                     <a:solidFill>
                       <a:srgbClr val="626A6F"/>
                     </a:solidFill>
-                    <a:latin typeface="Arial"/>
+                    <a:latin typeface="Times New Roman"/>
                     <a:ea typeface="Arial"/>
                     <a:cs typeface="Arial"/>
                   </a:rPr>
@@ -19767,7 +19767,7 @@
                     <a:solidFill>
                       <a:srgbClr val="626A6F"/>
                     </a:solidFill>
-                    <a:latin typeface="Arial"/>
+                    <a:latin typeface="Times New Roman"/>
                     <a:ea typeface="Arial"/>
                     <a:cs typeface="Arial"/>
                   </a:rPr>

--- a/artifacts/semantic_revision_20261022/pptx/Figure04_Semantic.pptx
+++ b/artifacts/semantic_revision_20261022/pptx/Figure04_Semantic.pptx
@@ -3636,7 +3636,7 @@
                     <a:solidFill>
                       <a:srgbClr val="24272A"/>
                     </a:solidFill>
-                    <a:latin typeface="Times New Roman"/>
+                    <a:latin typeface="Comic Sans MS"/>
                     <a:ea typeface="Comic Sans MS"/>
                     <a:cs typeface="Comic Sans MS"/>
                   </a:rPr>
@@ -3924,7 +3924,7 @@
                     <a:solidFill>
                       <a:srgbClr val="24272A"/>
                     </a:solidFill>
-                    <a:latin typeface="Times New Roman"/>
+                    <a:latin typeface="Comic Sans MS"/>
                     <a:ea typeface="Comic Sans MS"/>
                     <a:cs typeface="Comic Sans MS"/>
                   </a:rPr>
@@ -4473,7 +4473,7 @@
                     <a:solidFill>
                       <a:srgbClr val="24272A"/>
                     </a:solidFill>
-                    <a:latin typeface="Times New Roman"/>
+                    <a:latin typeface="Comic Sans MS"/>
                     <a:ea typeface="Comic Sans MS"/>
                     <a:cs typeface="Comic Sans MS"/>
                   </a:rPr>
@@ -5032,7 +5032,7 @@
                     <a:solidFill>
                       <a:srgbClr val="24272A"/>
                     </a:solidFill>
-                    <a:latin typeface="Times New Roman"/>
+                    <a:latin typeface="Comic Sans MS"/>
                     <a:ea typeface="Comic Sans MS"/>
                     <a:cs typeface="Comic Sans MS"/>
                   </a:rPr>
@@ -5430,7 +5430,7 @@
                     <a:solidFill>
                       <a:srgbClr val="24272A"/>
                     </a:solidFill>
-                    <a:latin typeface="Times New Roman"/>
+                    <a:latin typeface="Comic Sans MS"/>
                     <a:ea typeface="Comic Sans MS"/>
                     <a:cs typeface="Comic Sans MS"/>
                   </a:rPr>
@@ -5588,7 +5588,7 @@
                     <a:solidFill>
                       <a:srgbClr val="24272A"/>
                     </a:solidFill>
-                    <a:latin typeface="Times New Roman"/>
+                    <a:latin typeface="Arial"/>
                     <a:ea typeface="Arial"/>
                     <a:cs typeface="Arial"/>
                   </a:rPr>
@@ -5784,7 +5784,7 @@
                     <a:solidFill>
                       <a:srgbClr val="24272A"/>
                     </a:solidFill>
-                    <a:latin typeface="Times New Roman"/>
+                    <a:latin typeface="Arial"/>
                     <a:ea typeface="Arial"/>
                     <a:cs typeface="Arial"/>
                   </a:rPr>
@@ -5980,7 +5980,7 @@
                     <a:solidFill>
                       <a:srgbClr val="24272A"/>
                     </a:solidFill>
-                    <a:latin typeface="Times New Roman"/>
+                    <a:latin typeface="Arial"/>
                     <a:ea typeface="Arial"/>
                     <a:cs typeface="Arial"/>
                   </a:rPr>
@@ -6176,7 +6176,7 @@
                     <a:solidFill>
                       <a:srgbClr val="24272A"/>
                     </a:solidFill>
-                    <a:latin typeface="Times New Roman"/>
+                    <a:latin typeface="Arial"/>
                     <a:ea typeface="Arial"/>
                     <a:cs typeface="Arial"/>
                   </a:rPr>
@@ -6641,7 +6641,7 @@
                       <a:solidFill>
                         <a:srgbClr val="24272A"/>
                       </a:solidFill>
-                      <a:latin typeface="Times New Roman"/>
+                      <a:latin typeface="Arial"/>
                       <a:ea typeface="Arial"/>
                       <a:cs typeface="Arial"/>
                     </a:rPr>
@@ -7034,7 +7034,7 @@
                       <a:solidFill>
                         <a:srgbClr val="24272A"/>
                       </a:solidFill>
-                      <a:latin typeface="Times New Roman"/>
+                      <a:latin typeface="Arial"/>
                       <a:ea typeface="Arial"/>
                       <a:cs typeface="Arial"/>
                     </a:rPr>
@@ -7192,7 +7192,7 @@
                       <a:solidFill>
                         <a:srgbClr val="626A6F"/>
                       </a:solidFill>
-                      <a:latin typeface="Times New Roman"/>
+                      <a:latin typeface="Arial"/>
                       <a:ea typeface="Arial"/>
                       <a:cs typeface="Arial"/>
                     </a:rPr>
@@ -7650,7 +7650,7 @@
                       <a:solidFill>
                         <a:srgbClr val="24272A"/>
                       </a:solidFill>
-                      <a:latin typeface="Times New Roman"/>
+                      <a:latin typeface="Arial"/>
                       <a:ea typeface="Arial"/>
                       <a:cs typeface="Arial"/>
                     </a:rPr>
@@ -7808,7 +7808,7 @@
                       <a:solidFill>
                         <a:srgbClr val="626A6F"/>
                       </a:solidFill>
-                      <a:latin typeface="Times New Roman"/>
+                      <a:latin typeface="Arial"/>
                       <a:ea typeface="Arial"/>
                       <a:cs typeface="Arial"/>
                     </a:rPr>
@@ -8259,7 +8259,7 @@
                       <a:solidFill>
                         <a:srgbClr val="24272A"/>
                       </a:solidFill>
-                      <a:latin typeface="Times New Roman"/>
+                      <a:latin typeface="Arial"/>
                       <a:ea typeface="Arial"/>
                       <a:cs typeface="Arial"/>
                     </a:rPr>
@@ -8417,7 +8417,7 @@
                       <a:solidFill>
                         <a:srgbClr val="626A6F"/>
                       </a:solidFill>
-                      <a:latin typeface="Times New Roman"/>
+                      <a:latin typeface="Arial"/>
                       <a:ea typeface="Arial"/>
                       <a:cs typeface="Arial"/>
                     </a:rPr>
@@ -8794,7 +8794,7 @@
                       <a:solidFill>
                         <a:srgbClr val="24272A"/>
                       </a:solidFill>
-                      <a:latin typeface="Times New Roman"/>
+                      <a:latin typeface="Arial"/>
                       <a:ea typeface="Arial"/>
                       <a:cs typeface="Arial"/>
                     </a:rPr>
@@ -9480,7 +9480,7 @@
                       <a:solidFill>
                         <a:srgbClr val="24272A"/>
                       </a:solidFill>
-                      <a:latin typeface="Times New Roman"/>
+                      <a:latin typeface="Arial"/>
                       <a:ea typeface="Arial"/>
                       <a:cs typeface="Arial"/>
                     </a:rPr>
@@ -9812,7 +9812,7 @@
                       <a:solidFill>
                         <a:srgbClr val="24272A"/>
                       </a:solidFill>
-                      <a:latin typeface="Times New Roman"/>
+                      <a:latin typeface="Arial"/>
                       <a:ea typeface="Arial"/>
                       <a:cs typeface="Arial"/>
                     </a:rPr>
@@ -10623,7 +10623,7 @@
                       <a:solidFill>
                         <a:srgbClr val="24272A"/>
                       </a:solidFill>
-                      <a:latin typeface="Times New Roman"/>
+                      <a:latin typeface="Arial"/>
                       <a:ea typeface="Arial"/>
                       <a:cs typeface="Arial"/>
                     </a:rPr>
@@ -11352,7 +11352,7 @@
                       <a:solidFill>
                         <a:srgbClr val="24272A"/>
                       </a:solidFill>
-                      <a:latin typeface="Times New Roman"/>
+                      <a:latin typeface="Arial"/>
                       <a:ea typeface="Arial"/>
                       <a:cs typeface="Arial"/>
                     </a:rPr>
@@ -12368,7 +12368,7 @@
                       <a:solidFill>
                         <a:srgbClr val="24272A"/>
                       </a:solidFill>
-                      <a:latin typeface="Times New Roman"/>
+                      <a:latin typeface="Arial"/>
                       <a:ea typeface="Arial"/>
                       <a:cs typeface="Arial"/>
                     </a:rPr>
@@ -13105,7 +13105,7 @@
                       <a:solidFill>
                         <a:srgbClr val="24272A"/>
                       </a:solidFill>
-                      <a:latin typeface="Times New Roman"/>
+                      <a:latin typeface="Arial"/>
                       <a:ea typeface="Arial"/>
                       <a:cs typeface="Arial"/>
                     </a:rPr>
@@ -13785,7 +13785,7 @@
                       <a:solidFill>
                         <a:srgbClr val="24272A"/>
                       </a:solidFill>
-                      <a:latin typeface="Times New Roman"/>
+                      <a:latin typeface="Arial"/>
                       <a:ea typeface="Arial"/>
                       <a:cs typeface="Arial"/>
                     </a:rPr>
@@ -14141,7 +14141,7 @@
                       <a:solidFill>
                         <a:srgbClr val="24272A"/>
                       </a:solidFill>
-                      <a:latin typeface="Times New Roman"/>
+                      <a:latin typeface="Arial"/>
                       <a:ea typeface="Arial"/>
                       <a:cs typeface="Arial"/>
                     </a:rPr>
@@ -14299,7 +14299,7 @@
                       <a:solidFill>
                         <a:srgbClr val="24272A"/>
                       </a:solidFill>
-                      <a:latin typeface="Times New Roman"/>
+                      <a:latin typeface="Arial"/>
                       <a:ea typeface="Arial"/>
                       <a:cs typeface="Arial"/>
                     </a:rPr>
@@ -14921,7 +14921,7 @@
                       <a:solidFill>
                         <a:srgbClr val="24272A"/>
                       </a:solidFill>
-                      <a:latin typeface="Times New Roman"/>
+                      <a:latin typeface="Arial"/>
                       <a:ea typeface="Arial"/>
                       <a:cs typeface="Arial"/>
                     </a:rPr>
@@ -15624,7 +15624,7 @@
                       <a:solidFill>
                         <a:srgbClr val="24272A"/>
                       </a:solidFill>
-                      <a:latin typeface="Times New Roman"/>
+                      <a:latin typeface="Arial"/>
                       <a:ea typeface="Arial"/>
                       <a:cs typeface="Arial"/>
                     </a:rPr>
@@ -15959,7 +15959,7 @@
                       <a:solidFill>
                         <a:srgbClr val="24272A"/>
                       </a:solidFill>
-                      <a:latin typeface="Times New Roman"/>
+                      <a:latin typeface="Arial"/>
                       <a:ea typeface="Arial"/>
                       <a:cs typeface="Arial"/>
                     </a:rPr>
@@ -16133,7 +16133,7 @@
                     <a:solidFill>
                       <a:srgbClr val="24272A"/>
                     </a:solidFill>
-                    <a:latin typeface="Times New Roman"/>
+                    <a:latin typeface="Comic Sans MS"/>
                     <a:ea typeface="Comic Sans MS"/>
                     <a:cs typeface="Comic Sans MS"/>
                   </a:rPr>
@@ -16291,7 +16291,7 @@
                     <a:solidFill>
                       <a:srgbClr val="24272A"/>
                     </a:solidFill>
-                    <a:latin typeface="Times New Roman"/>
+                    <a:latin typeface="Comic Sans MS"/>
                     <a:ea typeface="Comic Sans MS"/>
                     <a:cs typeface="Comic Sans MS"/>
                   </a:rPr>
@@ -16449,7 +16449,7 @@
                     <a:solidFill>
                       <a:srgbClr val="24272A"/>
                     </a:solidFill>
-                    <a:latin typeface="Times New Roman"/>
+                    <a:latin typeface="Comic Sans MS"/>
                     <a:ea typeface="Comic Sans MS"/>
                     <a:cs typeface="Comic Sans MS"/>
                   </a:rPr>
@@ -16607,7 +16607,7 @@
                     <a:solidFill>
                       <a:srgbClr val="24272A"/>
                     </a:solidFill>
-                    <a:latin typeface="Times New Roman"/>
+                    <a:latin typeface="Comic Sans MS"/>
                     <a:ea typeface="Comic Sans MS"/>
                     <a:cs typeface="Comic Sans MS"/>
                   </a:rPr>
@@ -16765,7 +16765,7 @@
                     <a:solidFill>
                       <a:srgbClr val="24272A"/>
                     </a:solidFill>
-                    <a:latin typeface="Times New Roman"/>
+                    <a:latin typeface="Comic Sans MS"/>
                     <a:ea typeface="Comic Sans MS"/>
                     <a:cs typeface="Comic Sans MS"/>
                   </a:rPr>
@@ -18301,7 +18301,7 @@
                     <a:solidFill>
                       <a:srgbClr val="626A6F"/>
                     </a:solidFill>
-                    <a:latin typeface="Times New Roman"/>
+                    <a:latin typeface="Arial"/>
                     <a:ea typeface="Arial"/>
                     <a:cs typeface="Arial"/>
                   </a:rPr>
@@ -18459,7 +18459,7 @@
                     <a:solidFill>
                       <a:srgbClr val="626A6F"/>
                     </a:solidFill>
-                    <a:latin typeface="Times New Roman"/>
+                    <a:latin typeface="Arial"/>
                     <a:ea typeface="Arial"/>
                     <a:cs typeface="Arial"/>
                   </a:rPr>
@@ -19293,7 +19293,7 @@
                     <a:solidFill>
                       <a:srgbClr val="626A6F"/>
                     </a:solidFill>
-                    <a:latin typeface="Times New Roman"/>
+                    <a:latin typeface="Arial"/>
                     <a:ea typeface="Arial"/>
                     <a:cs typeface="Arial"/>
                   </a:rPr>
@@ -19451,7 +19451,7 @@
                     <a:solidFill>
                       <a:srgbClr val="626A6F"/>
                     </a:solidFill>
-                    <a:latin typeface="Times New Roman"/>
+                    <a:latin typeface="Arial"/>
                     <a:ea typeface="Arial"/>
                     <a:cs typeface="Arial"/>
                   </a:rPr>
@@ -19609,7 +19609,7 @@
                     <a:solidFill>
                       <a:srgbClr val="626A6F"/>
                     </a:solidFill>
-                    <a:latin typeface="Times New Roman"/>
+                    <a:latin typeface="Arial"/>
                     <a:ea typeface="Arial"/>
                     <a:cs typeface="Arial"/>
                   </a:rPr>
@@ -19767,7 +19767,7 @@
                     <a:solidFill>
                       <a:srgbClr val="626A6F"/>
                     </a:solidFill>
-                    <a:latin typeface="Times New Roman"/>
+                    <a:latin typeface="Arial"/>
                     <a:ea typeface="Arial"/>
                     <a:cs typeface="Arial"/>
                   </a:rPr>
